--- a/assets/pptx-tpl/ux-research-1.pptx
+++ b/assets/pptx-tpl/ux-research-1.pptx
@@ -15,6 +15,7 @@
     <p:sldId id="259" r:id="rId11"/>
     <p:sldId id="260" r:id="rId12"/>
     <p:sldId id="261" r:id="rId13"/>
+    <p:sldId id="268" r:id="rId32"/>
   </p:sldIdLst>
   <p:sldSz cy="5143500" cx="9144000"/>
   <p:notesSz cx="6858000" cy="9144000"/>
@@ -9809,6 +9810,1147 @@
                 <a:sym typeface="Montserrat"/>
               </a:rPr>
               <a:t>судалгааны тайлан</a:t>
+            </a:r>
+            <a:endParaRPr/>
+          </a:p>
+        </p:txBody>
+      </p:sp>
+      <p:sp>
+        <p:nvSpPr>
+          <p:cNvPr id="84" name="Google Shape;84;p17"/>
+          <p:cNvSpPr txBox="1"/>
+          <p:nvPr/>
+        </p:nvSpPr>
+        <p:spPr>
+          <a:xfrm>
+            <a:off x="796542" y="3660518"/>
+            <a:ext cx="3168331" cy="615523"/>
+          </a:xfrm>
+          <a:prstGeom prst="rect">
+            <a:avLst/>
+          </a:prstGeom>
+          <a:noFill/>
+          <a:ln>
+            <a:noFill/>
+          </a:ln>
+        </p:spPr>
+        <p:txBody>
+          <a:bodyPr anchorCtr="0" anchor="t" bIns="34275" lIns="0" spcFirstLastPara="1" rIns="68575" wrap="square" tIns="34275">
+            <a:spAutoFit/>
+          </a:bodyPr>
+          <a:lstStyle/>
+          <a:p>
+            <a:pPr indent="0" lvl="0" marL="0" marR="0" rtl="0" algn="l">
+              <a:lnSpc>
+                <a:spcPct val="100000"/>
+              </a:lnSpc>
+              <a:spcBef>
+                <a:spcPts val="0"/>
+              </a:spcBef>
+              <a:spcAft>
+                <a:spcPts val="300"/>
+              </a:spcAft>
+              <a:buClr>
+                <a:srgbClr val="000000"/>
+              </a:buClr>
+              <a:buSzPts val="1100"/>
+              <a:buFont typeface="Arial"/>
+              <a:buNone/>
+            </a:pPr>
+            <a:r>
+              <a:rPr b="0" i="0" lang="mn-MN" sz="1100" u="none" cap="none" strike="noStrike">
+                <a:solidFill>
+                  <a:schemeClr val="lt1"/>
+                </a:solidFill>
+                <a:latin typeface="Arial"/>
+                <a:ea typeface="Arial"/>
+                <a:cs typeface="Arial"/>
+                <a:sym typeface="Arial"/>
+              </a:rPr>
+              <a:t>Товч бөгөөд ойлгомжтой тайлбар. Үзэгчдэд хэрэгтэй мэдээллийг өгнө.</a:t>
+            </a:r>
+            <a:endParaRPr b="0" i="0" sz="1100" u="none" cap="none" strike="noStrike">
+              <a:solidFill>
+                <a:schemeClr val="lt1"/>
+              </a:solidFill>
+              <a:latin typeface="Arial"/>
+              <a:ea typeface="Arial"/>
+              <a:cs typeface="Arial"/>
+              <a:sym typeface="Arial"/>
+            </a:endParaRPr>
+          </a:p>
+        </p:txBody>
+      </p:sp>
+      <p:pic>
+        <p:nvPicPr>
+          <p:cNvPr descr="24slides Karir &amp; Profil 2022 | Glints" id="85" name="Google Shape;85;p17"/>
+          <p:cNvPicPr preferRelativeResize="0"/>
+          <p:nvPr/>
+        </p:nvPicPr>
+        <p:blipFill rotWithShape="1">
+          <a:blip r:embed="rIdGc1">
+            <a:alphaModFix/>
+          </a:blip>
+          <a:stretch/>
+        </p:blipFill>
+        <p:spPr>
+          <a:xfrm>
+            <a:off x="7860050" y="4454445"/>
+            <a:ext cx="1033125" cy="333725"/>
+          </a:xfrm>
+          <a:prstGeom prst="rect">
+            <a:avLst/>
+          </a:prstGeom>
+          <a:noFill/>
+          <a:ln>
+            <a:noFill/>
+          </a:ln>
+        </p:spPr>
+      </p:pic>
+      <p:grpSp>
+        <p:nvGrpSpPr>
+          <p:cNvPr id="86" name="Google Shape;86;p17"/>
+          <p:cNvGrpSpPr/>
+          <p:nvPr/>
+        </p:nvGrpSpPr>
+        <p:grpSpPr>
+          <a:xfrm rot="2700000">
+            <a:off x="4223323" y="3104676"/>
+            <a:ext cx="308529" cy="307776"/>
+            <a:chOff x="10439928" y="2985331"/>
+            <a:chExt cx="641137" cy="639573"/>
+          </a:xfrm>
+        </p:grpSpPr>
+        <p:sp>
+          <p:nvSpPr>
+            <p:cNvPr id="87" name="Google Shape;87;p17"/>
+            <p:cNvSpPr/>
+            <p:nvPr/>
+          </p:nvSpPr>
+          <p:spPr>
+            <a:xfrm>
+              <a:off x="10439928" y="2985331"/>
+              <a:ext cx="637800" cy="637800"/>
+            </a:xfrm>
+            <a:prstGeom prst="ellipse">
+              <a:avLst/>
+            </a:prstGeom>
+            <a:noFill/>
+            <a:ln cap="flat" cmpd="sng" w="9525">
+              <a:solidFill>
+                <a:schemeClr val="lt1">
+                  <a:alpha val="58431"/>
+                </a:schemeClr>
+              </a:solidFill>
+              <a:prstDash val="solid"/>
+              <a:miter lim="800000"/>
+              <a:headEnd len="sm" w="sm" type="none"/>
+              <a:tailEnd len="sm" w="sm" type="none"/>
+            </a:ln>
+          </p:spPr>
+          <p:txBody>
+            <a:bodyPr anchorCtr="0" anchor="ctr" bIns="25700" lIns="51425" spcFirstLastPara="1" rIns="51425" wrap="square" tIns="25700">
+              <a:noAutofit/>
+            </a:bodyPr>
+            <a:lstStyle/>
+            <a:p>
+              <a:pPr indent="0" lvl="0" marL="0" marR="0" rtl="0" algn="ctr">
+                <a:lnSpc>
+                  <a:spcPct val="100000"/>
+                </a:lnSpc>
+                <a:spcBef>
+                  <a:spcPts val="0"/>
+                </a:spcBef>
+                <a:spcAft>
+                  <a:spcPts val="0"/>
+                </a:spcAft>
+                <a:buClr>
+                  <a:schemeClr val="dk1"/>
+                </a:buClr>
+                <a:buSzPts val="1100"/>
+                <a:buFont typeface="Manrope"/>
+                <a:buNone/>
+              </a:pPr>
+              <a:r>
+                <a:t/>
+              </a:r>
+              <a:endParaRPr b="0" i="0" sz="1100" u="none" cap="none" strike="noStrike">
+                <a:solidFill>
+                  <a:schemeClr val="lt1"/>
+                </a:solidFill>
+                <a:latin typeface="Arial"/>
+                <a:ea typeface="Arial"/>
+                <a:cs typeface="Arial"/>
+                <a:sym typeface="Arial"/>
+              </a:endParaRPr>
+            </a:p>
+          </p:txBody>
+        </p:sp>
+        <p:grpSp>
+          <p:nvGrpSpPr>
+            <p:cNvPr id="88" name="Google Shape;88;p17"/>
+            <p:cNvGrpSpPr/>
+            <p:nvPr/>
+          </p:nvGrpSpPr>
+          <p:grpSpPr>
+            <a:xfrm rot="-2700000">
+              <a:off x="10645147" y="3223767"/>
+              <a:ext cx="227912" cy="160767"/>
+              <a:chOff x="3179128" y="1641228"/>
+              <a:chExt cx="1045800" cy="737700"/>
+            </a:xfrm>
+          </p:grpSpPr>
+          <p:sp>
+            <p:nvSpPr>
+              <p:cNvPr id="89" name="Google Shape;89;p17"/>
+              <p:cNvSpPr/>
+              <p:nvPr/>
+            </p:nvSpPr>
+            <p:spPr>
+              <a:xfrm>
+                <a:off x="3829228" y="1641228"/>
+                <a:ext cx="395700" cy="737700"/>
+              </a:xfrm>
+              <a:prstGeom prst="chevron">
+                <a:avLst>
+                  <a:gd fmla="val 100000" name="adj"/>
+                </a:avLst>
+              </a:prstGeom>
+              <a:solidFill>
+                <a:schemeClr val="accent1"/>
+              </a:solidFill>
+              <a:ln cap="flat" cmpd="sng" w="12700">
+                <a:solidFill>
+                  <a:srgbClr val="FADF4B"/>
+                </a:solidFill>
+                <a:prstDash val="solid"/>
+                <a:miter lim="800000"/>
+                <a:headEnd len="sm" w="sm" type="none"/>
+                <a:tailEnd len="sm" w="sm" type="none"/>
+              </a:ln>
+            </p:spPr>
+            <p:txBody>
+              <a:bodyPr anchorCtr="0" anchor="ctr" bIns="25700" lIns="51425" spcFirstLastPara="1" rIns="51425" wrap="square" tIns="25700">
+                <a:noAutofit/>
+              </a:bodyPr>
+              <a:lstStyle/>
+              <a:p>
+                <a:pPr indent="0" lvl="0" marL="0" marR="0" rtl="0" algn="ctr">
+                  <a:lnSpc>
+                    <a:spcPct val="100000"/>
+                  </a:lnSpc>
+                  <a:spcBef>
+                    <a:spcPts val="0"/>
+                  </a:spcBef>
+                  <a:spcAft>
+                    <a:spcPts val="0"/>
+                  </a:spcAft>
+                  <a:buClr>
+                    <a:schemeClr val="dk1"/>
+                  </a:buClr>
+                  <a:buSzPts val="1100"/>
+                  <a:buFont typeface="Manrope"/>
+                  <a:buNone/>
+                </a:pPr>
+                <a:r>
+                  <a:t/>
+                </a:r>
+                <a:endParaRPr b="0" i="0" sz="1100" u="none" cap="none" strike="noStrike">
+                  <a:solidFill>
+                    <a:schemeClr val="dk1"/>
+                  </a:solidFill>
+                  <a:latin typeface="Arial"/>
+                  <a:ea typeface="Arial"/>
+                  <a:cs typeface="Arial"/>
+                  <a:sym typeface="Arial"/>
+                </a:endParaRPr>
+              </a:p>
+            </p:txBody>
+          </p:sp>
+          <p:cxnSp>
+            <p:nvCxnSpPr>
+              <p:cNvPr id="90" name="Google Shape;90;p17"/>
+              <p:cNvCxnSpPr>
+                <a:stCxn id="89" idx="1"/>
+              </p:cNvCxnSpPr>
+              <p:nvPr/>
+            </p:nvCxnSpPr>
+            <p:spPr>
+              <a:xfrm flipH="1">
+                <a:off x="3179128" y="2010078"/>
+                <a:ext cx="1045800" cy="19800"/>
+              </a:xfrm>
+              <a:prstGeom prst="straightConnector1">
+                <a:avLst/>
+              </a:prstGeom>
+              <a:noFill/>
+              <a:ln cap="flat" cmpd="sng" w="12700">
+                <a:solidFill>
+                  <a:srgbClr val="FADF4B"/>
+                </a:solidFill>
+                <a:prstDash val="solid"/>
+                <a:miter lim="800000"/>
+                <a:headEnd len="sm" w="sm" type="none"/>
+                <a:tailEnd len="sm" w="sm" type="none"/>
+              </a:ln>
+            </p:spPr>
+          </p:cxnSp>
+        </p:grpSp>
+        <p:sp>
+          <p:nvSpPr>
+            <p:cNvPr id="91" name="Google Shape;91;p17"/>
+            <p:cNvSpPr/>
+            <p:nvPr/>
+          </p:nvSpPr>
+          <p:spPr>
+            <a:xfrm>
+              <a:off x="10443265" y="2987104"/>
+              <a:ext cx="637800" cy="637800"/>
+            </a:xfrm>
+            <a:prstGeom prst="arc">
+              <a:avLst>
+                <a:gd fmla="val 16200000" name="adj1"/>
+                <a:gd fmla="val 2547781" name="adj2"/>
+              </a:avLst>
+            </a:prstGeom>
+            <a:noFill/>
+            <a:ln cap="flat" cmpd="sng" w="19050">
+              <a:solidFill>
+                <a:srgbClr val="FADF4B"/>
+              </a:solidFill>
+              <a:prstDash val="solid"/>
+              <a:miter lim="800000"/>
+              <a:headEnd len="sm" w="sm" type="none"/>
+              <a:tailEnd len="sm" w="sm" type="none"/>
+            </a:ln>
+          </p:spPr>
+          <p:txBody>
+            <a:bodyPr anchorCtr="0" anchor="ctr" bIns="25700" lIns="51425" spcFirstLastPara="1" rIns="51425" wrap="square" tIns="25700">
+              <a:noAutofit/>
+            </a:bodyPr>
+            <a:lstStyle/>
+            <a:p>
+              <a:pPr indent="0" lvl="0" marL="0" marR="0" rtl="0" algn="ctr">
+                <a:lnSpc>
+                  <a:spcPct val="100000"/>
+                </a:lnSpc>
+                <a:spcBef>
+                  <a:spcPts val="0"/>
+                </a:spcBef>
+                <a:spcAft>
+                  <a:spcPts val="0"/>
+                </a:spcAft>
+                <a:buClr>
+                  <a:schemeClr val="dk1"/>
+                </a:buClr>
+                <a:buSzPts val="1100"/>
+                <a:buFont typeface="Manrope"/>
+                <a:buNone/>
+              </a:pPr>
+              <a:r>
+                <a:t/>
+              </a:r>
+              <a:endParaRPr b="0" i="0" sz="1100" u="none" cap="none" strike="noStrike">
+                <a:solidFill>
+                  <a:schemeClr val="dk1"/>
+                </a:solidFill>
+                <a:latin typeface="Arial"/>
+                <a:ea typeface="Arial"/>
+                <a:cs typeface="Arial"/>
+                <a:sym typeface="Arial"/>
+              </a:endParaRPr>
+            </a:p>
+          </p:txBody>
+        </p:sp>
+      </p:grpSp>
+    </p:spTree>
+  </p:cSld>
+  <p:clrMapOvr>
+    <a:masterClrMapping/>
+  </p:clrMapOvr>
+</p:sld>
+</file>
+
+<file path=ppt/slides/slide13.xml><?xml version="1.0" encoding="utf-8"?>
+<p:sld xmlns:a="http://schemas.openxmlformats.org/drawingml/2006/main" xmlns:r="http://schemas.openxmlformats.org/officeDocument/2006/relationships" xmlns:mc="http://schemas.openxmlformats.org/markup-compatibility/2006" xmlns:mv="urn:schemas-microsoft-com:mac:vml" xmlns:p="http://schemas.openxmlformats.org/presentationml/2006/main" xmlns:c="http://schemas.openxmlformats.org/drawingml/2006/chart" xmlns:dgm="http://schemas.openxmlformats.org/drawingml/2006/diagram" xmlns:o="urn:schemas-microsoft-com:office:office" xmlns:v="urn:schemas-microsoft-com:vml" xmlns:pvml="urn:schemas-microsoft-com:office:powerpoint" xmlns:com="http://schemas.openxmlformats.org/drawingml/2006/compatibility" xmlns:p14="http://schemas.microsoft.com/office/powerpoint/2010/main" xmlns:p15="http://schemas.microsoft.com/office/powerpoint/2012/main" xmlns:ahyp="http://schemas.microsoft.com/office/drawing/2018/hyperlinkcolor">
+  <p:cSld>
+    <p:spTree>
+      <p:nvGrpSpPr>
+        <p:cNvPr id="71" name="Shape 71"/>
+        <p:cNvGrpSpPr/>
+        <p:nvPr/>
+      </p:nvGrpSpPr>
+      <p:grpSpPr>
+        <a:xfrm>
+          <a:off x="0" y="0"/>
+          <a:ext cx="0" cy="0"/>
+          <a:chOff x="0" y="0"/>
+          <a:chExt cx="0" cy="0"/>
+        </a:xfrm>
+      </p:grpSpPr>
+      <p:sp>
+        <p:nvSpPr>
+          <p:cNvPr id="72" name="Google Shape;72;p17"/>
+          <p:cNvSpPr/>
+          <p:nvPr/>
+        </p:nvSpPr>
+        <p:spPr>
+          <a:xfrm>
+            <a:off x="0" y="-3"/>
+            <a:ext cx="9144000" cy="5143497"/>
+          </a:xfrm>
+          <a:prstGeom prst="rect">
+            <a:avLst/>
+          </a:prstGeom>
+          <a:gradFill>
+            <a:gsLst>
+              <a:gs pos="0">
+                <a:srgbClr val="5BB180"/>
+              </a:gs>
+              <a:gs pos="29000">
+                <a:srgbClr val="05121A"/>
+              </a:gs>
+              <a:gs pos="100000">
+                <a:srgbClr val="05121A"/>
+              </a:gs>
+            </a:gsLst>
+            <a:path path="circle">
+              <a:fillToRect b="0%" l="100%" r="0%" t="100%"/>
+            </a:path>
+            <a:tileRect b="-100%" l="0%" r="-100%" t="0%"/>
+          </a:gradFill>
+          <a:ln>
+            <a:noFill/>
+          </a:ln>
+        </p:spPr>
+        <p:txBody>
+          <a:bodyPr anchorCtr="0" anchor="ctr" bIns="34275" lIns="68575" spcFirstLastPara="1" rIns="68575" wrap="square" tIns="34275">
+            <a:noAutofit/>
+          </a:bodyPr>
+          <a:lstStyle/>
+          <a:p>
+            <a:pPr indent="0" lvl="0" marL="0" marR="0" rtl="0" algn="ctr">
+              <a:lnSpc>
+                <a:spcPct val="100000"/>
+              </a:lnSpc>
+              <a:spcBef>
+                <a:spcPts val="0"/>
+              </a:spcBef>
+              <a:spcAft>
+                <a:spcPts val="0"/>
+              </a:spcAft>
+              <a:buClr>
+                <a:srgbClr val="000000"/>
+              </a:buClr>
+              <a:buSzPts val="1400"/>
+              <a:buFont typeface="Arial"/>
+              <a:buNone/>
+            </a:pPr>
+            <a:r>
+              <a:t/>
+            </a:r>
+            <a:endParaRPr b="0" i="0" sz="1400" u="none" cap="none" strike="noStrike">
+              <a:solidFill>
+                <a:schemeClr val="lt1"/>
+              </a:solidFill>
+              <a:latin typeface="Manrope"/>
+              <a:ea typeface="Manrope"/>
+              <a:cs typeface="Manrope"/>
+              <a:sym typeface="Manrope"/>
+            </a:endParaRPr>
+          </a:p>
+        </p:txBody>
+      </p:sp>
+      <p:sp>
+        <p:nvSpPr>
+          <p:cNvPr id="73" name="Google Shape;73;p17"/>
+          <p:cNvSpPr/>
+          <p:nvPr/>
+        </p:nvSpPr>
+        <p:spPr>
+          <a:xfrm flipH="1">
+            <a:off x="-6" y="3038478"/>
+            <a:ext cx="3876676" cy="2105022"/>
+          </a:xfrm>
+          <a:prstGeom prst="rect">
+            <a:avLst/>
+          </a:prstGeom>
+          <a:gradFill>
+            <a:gsLst>
+              <a:gs pos="0">
+                <a:srgbClr val="5BB180"/>
+              </a:gs>
+              <a:gs pos="26000">
+                <a:srgbClr val="05121A"/>
+              </a:gs>
+              <a:gs pos="100000">
+                <a:srgbClr val="05121A"/>
+              </a:gs>
+            </a:gsLst>
+            <a:path path="circle">
+              <a:fillToRect b="0%" l="100%" r="0%" t="100%"/>
+            </a:path>
+            <a:tileRect b="-100%" l="0%" r="-100%" t="0%"/>
+          </a:gradFill>
+          <a:ln>
+            <a:noFill/>
+          </a:ln>
+        </p:spPr>
+        <p:txBody>
+          <a:bodyPr anchorCtr="0" anchor="ctr" bIns="34275" lIns="68575" spcFirstLastPara="1" rIns="68575" wrap="square" tIns="34275">
+            <a:noAutofit/>
+          </a:bodyPr>
+          <a:lstStyle/>
+          <a:p>
+            <a:pPr indent="0" lvl="0" marL="0" marR="0" rtl="0" algn="ctr">
+              <a:lnSpc>
+                <a:spcPct val="100000"/>
+              </a:lnSpc>
+              <a:spcBef>
+                <a:spcPts val="0"/>
+              </a:spcBef>
+              <a:spcAft>
+                <a:spcPts val="0"/>
+              </a:spcAft>
+              <a:buClr>
+                <a:srgbClr val="000000"/>
+              </a:buClr>
+              <a:buSzPts val="1400"/>
+              <a:buFont typeface="Arial"/>
+              <a:buNone/>
+            </a:pPr>
+            <a:r>
+              <a:t/>
+            </a:r>
+            <a:endParaRPr b="0" i="0" sz="1400" u="none" cap="none" strike="noStrike">
+              <a:solidFill>
+                <a:schemeClr val="lt1"/>
+              </a:solidFill>
+              <a:latin typeface="Manrope"/>
+              <a:ea typeface="Manrope"/>
+              <a:cs typeface="Manrope"/>
+              <a:sym typeface="Manrope"/>
+            </a:endParaRPr>
+          </a:p>
+        </p:txBody>
+      </p:sp>
+      <p:sp>
+        <p:nvSpPr>
+          <p:cNvPr id="74" name="Google Shape;74;p17"/>
+          <p:cNvSpPr/>
+          <p:nvPr/>
+        </p:nvSpPr>
+        <p:spPr>
+          <a:xfrm flipH="1" rot="-5400000">
+            <a:off x="6883242" y="-392802"/>
+            <a:ext cx="1881188" cy="2640332"/>
+          </a:xfrm>
+          <a:prstGeom prst="flowChartManualInput">
+            <a:avLst/>
+          </a:prstGeom>
+          <a:gradFill>
+            <a:gsLst>
+              <a:gs pos="0">
+                <a:schemeClr val="accent3"/>
+              </a:gs>
+              <a:gs pos="38000">
+                <a:srgbClr val="5BB180"/>
+              </a:gs>
+              <a:gs pos="67000">
+                <a:srgbClr val="31644F"/>
+              </a:gs>
+              <a:gs pos="100000">
+                <a:srgbClr val="05121A"/>
+              </a:gs>
+            </a:gsLst>
+            <a:path path="circle">
+              <a:fillToRect b="100%" l="100%" r="0%" t="0%"/>
+            </a:path>
+            <a:tileRect b="0%" l="0%" r="-100%" t="-100%"/>
+          </a:gradFill>
+          <a:ln>
+            <a:noFill/>
+          </a:ln>
+        </p:spPr>
+        <p:txBody>
+          <a:bodyPr anchorCtr="0" anchor="ctr" bIns="34275" lIns="68575" spcFirstLastPara="1" rIns="68575" wrap="square" tIns="34275">
+            <a:noAutofit/>
+          </a:bodyPr>
+          <a:lstStyle/>
+          <a:p>
+            <a:pPr indent="0" lvl="0" marL="0" marR="0" rtl="0" algn="ctr">
+              <a:lnSpc>
+                <a:spcPct val="100000"/>
+              </a:lnSpc>
+              <a:spcBef>
+                <a:spcPts val="0"/>
+              </a:spcBef>
+              <a:spcAft>
+                <a:spcPts val="0"/>
+              </a:spcAft>
+              <a:buClr>
+                <a:srgbClr val="000000"/>
+              </a:buClr>
+              <a:buSzPts val="1400"/>
+              <a:buFont typeface="Arial"/>
+              <a:buNone/>
+            </a:pPr>
+            <a:r>
+              <a:t/>
+            </a:r>
+            <a:endParaRPr b="0" i="0" sz="1400" u="none" cap="none" strike="noStrike">
+              <a:solidFill>
+                <a:schemeClr val="lt1"/>
+              </a:solidFill>
+              <a:latin typeface="Manrope"/>
+              <a:ea typeface="Manrope"/>
+              <a:cs typeface="Manrope"/>
+              <a:sym typeface="Manrope"/>
+            </a:endParaRPr>
+          </a:p>
+        </p:txBody>
+      </p:sp>
+      <p:sp>
+        <p:nvSpPr>
+          <p:cNvPr id="75" name="Google Shape;75;p17"/>
+          <p:cNvSpPr/>
+          <p:nvPr/>
+        </p:nvSpPr>
+        <p:spPr>
+          <a:xfrm>
+            <a:off x="-3" y="0"/>
+            <a:ext cx="7184574" cy="5143497"/>
+          </a:xfrm>
+          <a:custGeom>
+            <a:rect b="b" l="l" r="r" t="t"/>
+            <a:pathLst>
+              <a:path extrusionOk="0" h="6857996" w="9579432">
+                <a:moveTo>
+                  <a:pt x="0" y="0"/>
+                </a:moveTo>
+                <a:lnTo>
+                  <a:pt x="9579432" y="0"/>
+                </a:lnTo>
+                <a:lnTo>
+                  <a:pt x="9579431" y="4"/>
+                </a:lnTo>
+                <a:lnTo>
+                  <a:pt x="3913990" y="4"/>
+                </a:lnTo>
+                <a:lnTo>
+                  <a:pt x="4570139" y="1768319"/>
+                </a:lnTo>
+                <a:cubicBezTo>
+                  <a:pt x="4570139" y="1768319"/>
+                  <a:pt x="4938048" y="2505077"/>
+                  <a:pt x="5705107" y="2505077"/>
+                </a:cubicBezTo>
+                <a:lnTo>
+                  <a:pt x="8676383" y="2505077"/>
+                </a:lnTo>
+                <a:lnTo>
+                  <a:pt x="7107210" y="6857996"/>
+                </a:lnTo>
+                <a:lnTo>
+                  <a:pt x="1136912" y="6857996"/>
+                </a:lnTo>
+                <a:lnTo>
+                  <a:pt x="0" y="3704178"/>
+                </a:lnTo>
+                <a:lnTo>
+                  <a:pt x="0" y="0"/>
+                </a:lnTo>
+                <a:close/>
+              </a:path>
+            </a:pathLst>
+          </a:custGeom>
+          <a:gradFill>
+            <a:gsLst>
+              <a:gs pos="0">
+                <a:schemeClr val="accent3"/>
+              </a:gs>
+              <a:gs pos="44000">
+                <a:srgbClr val="5BB180"/>
+              </a:gs>
+              <a:gs pos="67000">
+                <a:srgbClr val="31644F"/>
+              </a:gs>
+              <a:gs pos="100000">
+                <a:srgbClr val="05121A"/>
+              </a:gs>
+            </a:gsLst>
+            <a:path path="circle">
+              <a:fillToRect b="100%" l="100%" r="0%" t="0%"/>
+            </a:path>
+            <a:tileRect b="0%" l="0%" r="-100%" t="-100%"/>
+          </a:gradFill>
+          <a:ln>
+            <a:noFill/>
+          </a:ln>
+        </p:spPr>
+        <p:txBody>
+          <a:bodyPr anchorCtr="0" anchor="ctr" bIns="34275" lIns="68575" spcFirstLastPara="1" rIns="68575" wrap="square" tIns="34275">
+            <a:noAutofit/>
+          </a:bodyPr>
+          <a:lstStyle/>
+          <a:p>
+            <a:pPr indent="0" lvl="0" marL="0" marR="0" rtl="0" algn="ctr">
+              <a:lnSpc>
+                <a:spcPct val="100000"/>
+              </a:lnSpc>
+              <a:spcBef>
+                <a:spcPts val="0"/>
+              </a:spcBef>
+              <a:spcAft>
+                <a:spcPts val="0"/>
+              </a:spcAft>
+              <a:buClr>
+                <a:srgbClr val="000000"/>
+              </a:buClr>
+              <a:buSzPts val="1400"/>
+              <a:buFont typeface="Arial"/>
+              <a:buNone/>
+            </a:pPr>
+            <a:r>
+              <a:t/>
+            </a:r>
+            <a:endParaRPr b="0" i="0" sz="1400" u="none" cap="none" strike="noStrike">
+              <a:solidFill>
+                <a:schemeClr val="lt1"/>
+              </a:solidFill>
+              <a:latin typeface="Manrope"/>
+              <a:ea typeface="Manrope"/>
+              <a:cs typeface="Manrope"/>
+              <a:sym typeface="Manrope"/>
+            </a:endParaRPr>
+          </a:p>
+        </p:txBody>
+      </p:sp>
+      <p:sp>
+        <p:nvSpPr>
+          <p:cNvPr id="76" name="Google Shape;76;p17"/>
+          <p:cNvSpPr/>
+          <p:nvPr/>
+        </p:nvSpPr>
+        <p:spPr>
+          <a:xfrm>
+            <a:off x="21428" y="0"/>
+            <a:ext cx="7184574" cy="5143497"/>
+          </a:xfrm>
+          <a:custGeom>
+            <a:rect b="b" l="l" r="r" t="t"/>
+            <a:pathLst>
+              <a:path extrusionOk="0" h="6857996" w="9579432">
+                <a:moveTo>
+                  <a:pt x="0" y="0"/>
+                </a:moveTo>
+                <a:lnTo>
+                  <a:pt x="9579432" y="0"/>
+                </a:lnTo>
+                <a:lnTo>
+                  <a:pt x="9579431" y="4"/>
+                </a:lnTo>
+                <a:lnTo>
+                  <a:pt x="3913990" y="4"/>
+                </a:lnTo>
+                <a:lnTo>
+                  <a:pt x="4570139" y="1768319"/>
+                </a:lnTo>
+                <a:cubicBezTo>
+                  <a:pt x="4570139" y="1768319"/>
+                  <a:pt x="4938048" y="2505077"/>
+                  <a:pt x="5705107" y="2505077"/>
+                </a:cubicBezTo>
+                <a:lnTo>
+                  <a:pt x="8676383" y="2505077"/>
+                </a:lnTo>
+                <a:lnTo>
+                  <a:pt x="7107210" y="6857996"/>
+                </a:lnTo>
+                <a:lnTo>
+                  <a:pt x="1136912" y="6857996"/>
+                </a:lnTo>
+                <a:lnTo>
+                  <a:pt x="0" y="3704178"/>
+                </a:lnTo>
+                <a:lnTo>
+                  <a:pt x="0" y="0"/>
+                </a:lnTo>
+                <a:close/>
+              </a:path>
+            </a:pathLst>
+          </a:custGeom>
+          <a:gradFill>
+            <a:gsLst>
+              <a:gs pos="0">
+                <a:srgbClr val="05121A"/>
+              </a:gs>
+              <a:gs pos="43000">
+                <a:srgbClr val="31644F"/>
+              </a:gs>
+              <a:gs pos="67000">
+                <a:srgbClr val="31644F"/>
+              </a:gs>
+              <a:gs pos="100000">
+                <a:srgbClr val="05121A">
+                  <a:alpha val="0"/>
+                </a:srgbClr>
+              </a:gs>
+            </a:gsLst>
+            <a:path path="circle">
+              <a:fillToRect b="100%" l="0%" r="100%" t="0%"/>
+            </a:path>
+            <a:tileRect b="0%" l="-100%" r="0%" t="-100%"/>
+          </a:gradFill>
+          <a:ln>
+            <a:noFill/>
+          </a:ln>
+        </p:spPr>
+        <p:txBody>
+          <a:bodyPr anchorCtr="0" anchor="ctr" bIns="34275" lIns="68575" spcFirstLastPara="1" rIns="68575" wrap="square" tIns="34275">
+            <a:noAutofit/>
+          </a:bodyPr>
+          <a:lstStyle/>
+          <a:p>
+            <a:pPr indent="0" lvl="0" marL="0" marR="0" rtl="0" algn="ctr">
+              <a:lnSpc>
+                <a:spcPct val="100000"/>
+              </a:lnSpc>
+              <a:spcBef>
+                <a:spcPts val="0"/>
+              </a:spcBef>
+              <a:spcAft>
+                <a:spcPts val="0"/>
+              </a:spcAft>
+              <a:buClr>
+                <a:srgbClr val="000000"/>
+              </a:buClr>
+              <a:buSzPts val="1400"/>
+              <a:buFont typeface="Arial"/>
+              <a:buNone/>
+            </a:pPr>
+            <a:r>
+              <a:t/>
+            </a:r>
+            <a:endParaRPr b="0" i="0" sz="1400" u="none" cap="none" strike="noStrike">
+              <a:solidFill>
+                <a:schemeClr val="lt1"/>
+              </a:solidFill>
+              <a:latin typeface="Manrope"/>
+              <a:ea typeface="Manrope"/>
+              <a:cs typeface="Manrope"/>
+              <a:sym typeface="Manrope"/>
+            </a:endParaRPr>
+          </a:p>
+        </p:txBody>
+      </p:sp>
+      <p:grpSp>
+        <p:nvGrpSpPr>
+          <p:cNvPr id="77" name="Google Shape;77;p17"/>
+          <p:cNvGrpSpPr/>
+          <p:nvPr/>
+        </p:nvGrpSpPr>
+        <p:grpSpPr>
+          <a:xfrm>
+            <a:off x="4712199" y="-147"/>
+            <a:ext cx="3944541" cy="3257841"/>
+            <a:chOff x="4712199" y="-350860"/>
+            <a:chExt cx="3944541" cy="3257841"/>
+          </a:xfrm>
+        </p:grpSpPr>
+        <p:cxnSp>
+          <p:nvCxnSpPr>
+            <p:cNvPr id="78" name="Google Shape;78;p17"/>
+            <p:cNvCxnSpPr>
+              <a:endCxn id="79" idx="2"/>
+            </p:cNvCxnSpPr>
+            <p:nvPr/>
+          </p:nvCxnSpPr>
+          <p:spPr>
+            <a:xfrm>
+              <a:off x="4712199" y="2906980"/>
+              <a:ext cx="3733800" cy="0"/>
+            </a:xfrm>
+            <a:prstGeom prst="straightConnector1">
+              <a:avLst/>
+            </a:prstGeom>
+            <a:noFill/>
+            <a:ln cap="flat" cmpd="sng" w="12700">
+              <a:solidFill>
+                <a:schemeClr val="lt1">
+                  <a:alpha val="32941"/>
+                </a:schemeClr>
+              </a:solidFill>
+              <a:prstDash val="solid"/>
+              <a:miter lim="800000"/>
+              <a:headEnd len="sm" w="sm" type="none"/>
+              <a:tailEnd len="sm" w="sm" type="none"/>
+            </a:ln>
+          </p:spPr>
+        </p:cxnSp>
+        <p:cxnSp>
+          <p:nvCxnSpPr>
+            <p:cNvPr id="80" name="Google Shape;80;p17"/>
+            <p:cNvCxnSpPr>
+              <a:endCxn id="79" idx="0"/>
+            </p:cNvCxnSpPr>
+            <p:nvPr/>
+          </p:nvCxnSpPr>
+          <p:spPr>
+            <a:xfrm>
+              <a:off x="8656739" y="-350860"/>
+              <a:ext cx="0" cy="3047100"/>
+            </a:xfrm>
+            <a:prstGeom prst="straightConnector1">
+              <a:avLst/>
+            </a:prstGeom>
+            <a:noFill/>
+            <a:ln cap="flat" cmpd="sng" w="12700">
+              <a:solidFill>
+                <a:srgbClr val="EDF1FF">
+                  <a:alpha val="32941"/>
+                </a:srgbClr>
+              </a:solidFill>
+              <a:prstDash val="solid"/>
+              <a:miter lim="800000"/>
+              <a:headEnd len="sm" w="sm" type="none"/>
+              <a:tailEnd len="sm" w="sm" type="none"/>
+            </a:ln>
+          </p:spPr>
+        </p:cxnSp>
+        <p:sp>
+          <p:nvSpPr>
+            <p:cNvPr id="79" name="Google Shape;79;p17"/>
+            <p:cNvSpPr/>
+            <p:nvPr/>
+          </p:nvSpPr>
+          <p:spPr>
+            <a:xfrm rot="5400000">
+              <a:off x="8235258" y="2485499"/>
+              <a:ext cx="421481" cy="421481"/>
+            </a:xfrm>
+            <a:prstGeom prst="arc">
+              <a:avLst>
+                <a:gd fmla="val 16200000" name="adj1"/>
+                <a:gd fmla="val 0" name="adj2"/>
+              </a:avLst>
+            </a:prstGeom>
+            <a:noFill/>
+            <a:ln cap="flat" cmpd="sng" w="12700">
+              <a:solidFill>
+                <a:schemeClr val="lt1">
+                  <a:alpha val="32941"/>
+                </a:schemeClr>
+              </a:solidFill>
+              <a:prstDash val="solid"/>
+              <a:miter lim="800000"/>
+              <a:headEnd len="sm" w="sm" type="none"/>
+              <a:tailEnd len="sm" w="sm" type="none"/>
+            </a:ln>
+          </p:spPr>
+          <p:txBody>
+            <a:bodyPr anchorCtr="0" anchor="ctr" bIns="34275" lIns="68575" spcFirstLastPara="1" rIns="68575" wrap="square" tIns="34275">
+              <a:noAutofit/>
+            </a:bodyPr>
+            <a:lstStyle/>
+            <a:p>
+              <a:pPr indent="0" lvl="0" marL="0" marR="0" rtl="0" algn="ctr">
+                <a:lnSpc>
+                  <a:spcPct val="100000"/>
+                </a:lnSpc>
+                <a:spcBef>
+                  <a:spcPts val="0"/>
+                </a:spcBef>
+                <a:spcAft>
+                  <a:spcPts val="0"/>
+                </a:spcAft>
+                <a:buClr>
+                  <a:srgbClr val="000000"/>
+                </a:buClr>
+                <a:buSzPts val="1400"/>
+                <a:buFont typeface="Arial"/>
+                <a:buNone/>
+              </a:pPr>
+              <a:r>
+                <a:t/>
+              </a:r>
+              <a:endParaRPr b="0" i="0" sz="1400" u="none" cap="none" strike="noStrike">
+                <a:solidFill>
+                  <a:schemeClr val="dk1"/>
+                </a:solidFill>
+                <a:latin typeface="Manrope"/>
+                <a:ea typeface="Manrope"/>
+                <a:cs typeface="Manrope"/>
+                <a:sym typeface="Manrope"/>
+              </a:endParaRPr>
+            </a:p>
+          </p:txBody>
+        </p:sp>
+      </p:grpSp>
+      <p:pic>
+        <p:nvPicPr>
+          <p:cNvPr id="81" name="Google Shape;81;p17"/>
+          <p:cNvPicPr preferRelativeResize="0"/>
+          <p:nvPr/>
+        </p:nvPicPr>
+        <p:blipFill rotWithShape="1">
+          <a:blip r:embed="rId3">
+            <a:alphaModFix/>
+          </a:blip>
+          <a:srcRect b="11716" l="0" r="0" t="15703"/>
+          <a:stretch/>
+        </p:blipFill>
+        <p:spPr>
+          <a:xfrm rot="8036273">
+            <a:off x="2110577" y="-1604313"/>
+            <a:ext cx="4403381" cy="6394153"/>
+          </a:xfrm>
+          <a:custGeom>
+            <a:rect b="b" l="l" r="r" t="t"/>
+            <a:pathLst>
+              <a:path extrusionOk="0" h="8525537" w="5871174">
+                <a:moveTo>
+                  <a:pt x="4093990" y="8525537"/>
+                </a:moveTo>
+                <a:lnTo>
+                  <a:pt x="0" y="4276878"/>
+                </a:lnTo>
+                <a:lnTo>
+                  <a:pt x="0" y="4276873"/>
+                </a:lnTo>
+                <a:lnTo>
+                  <a:pt x="2679906" y="7058024"/>
+                </a:lnTo>
+                <a:lnTo>
+                  <a:pt x="3497969" y="5358541"/>
+                </a:lnTo>
+                <a:cubicBezTo>
+                  <a:pt x="3497969" y="5358541"/>
+                  <a:pt x="3773219" y="4582393"/>
+                  <a:pt x="3240973" y="4030039"/>
+                </a:cubicBezTo>
+                <a:lnTo>
+                  <a:pt x="1179270" y="1890446"/>
+                </a:lnTo>
+                <a:lnTo>
+                  <a:pt x="5402589" y="0"/>
+                </a:lnTo>
+                <a:lnTo>
+                  <a:pt x="5871174" y="486288"/>
+                </a:lnTo>
+                <a:lnTo>
+                  <a:pt x="5871174" y="8525537"/>
+                </a:lnTo>
+                <a:close/>
+              </a:path>
+            </a:pathLst>
+          </a:custGeom>
+          <a:noFill/>
+          <a:ln>
+            <a:noFill/>
+          </a:ln>
+        </p:spPr>
+      </p:pic>
+      <p:pic>
+        <p:nvPicPr>
+          <p:cNvPr id="82" name="Google Shape;82;p17"/>
+          <p:cNvPicPr preferRelativeResize="0"/>
+          <p:nvPr/>
+        </p:nvPicPr>
+        <p:blipFill rotWithShape="1">
+          <a:blip r:embed="rId4">
+            <a:alphaModFix/>
+          </a:blip>
+          <a:srcRect b="16617" l="4466" r="0" t="21653"/>
+          <a:stretch/>
+        </p:blipFill>
+        <p:spPr>
+          <a:xfrm rot="-2246355">
+            <a:off x="6415122" y="10877"/>
+            <a:ext cx="2148739" cy="2777749"/>
+          </a:xfrm>
+          <a:custGeom>
+            <a:rect b="b" l="l" r="r" t="t"/>
+            <a:pathLst>
+              <a:path extrusionOk="0" h="3703665" w="2864985">
+                <a:moveTo>
+                  <a:pt x="2083861" y="0"/>
+                </a:moveTo>
+                <a:lnTo>
+                  <a:pt x="2864985" y="598063"/>
+                </a:lnTo>
+                <a:lnTo>
+                  <a:pt x="2864985" y="3612553"/>
+                </a:lnTo>
+                <a:lnTo>
+                  <a:pt x="2795226" y="3703665"/>
+                </a:lnTo>
+                <a:lnTo>
+                  <a:pt x="0" y="1563517"/>
+                </a:lnTo>
+                <a:close/>
+              </a:path>
+            </a:pathLst>
+          </a:custGeom>
+          <a:noFill/>
+          <a:ln>
+            <a:noFill/>
+          </a:ln>
+        </p:spPr>
+      </p:pic>
+      <p:sp>
+        <p:nvSpPr>
+          <p:cNvPr id="83" name="Google Shape;83;p17"/>
+          <p:cNvSpPr txBox="1"/>
+          <p:nvPr/>
+        </p:nvSpPr>
+        <p:spPr>
+          <a:xfrm>
+            <a:off x="796542" y="2260111"/>
+            <a:ext cx="5231027" cy="1300326"/>
+          </a:xfrm>
+          <a:prstGeom prst="rect">
+            <a:avLst/>
+          </a:prstGeom>
+          <a:noFill/>
+          <a:ln>
+            <a:noFill/>
+          </a:ln>
+        </p:spPr>
+        <p:txBody>
+          <a:bodyPr anchorCtr="0" anchor="t" bIns="34275" lIns="0" spcFirstLastPara="1" rIns="68575" wrap="square" tIns="34275">
+            <a:spAutoFit/>
+          </a:bodyPr>
+          <a:lstStyle/>
+          <a:p>
+            <a:pPr indent="0" lvl="0" marL="0" marR="0" rtl="0" algn="l">
+              <a:lnSpc>
+                <a:spcPct val="100000"/>
+              </a:lnSpc>
+              <a:spcBef>
+                <a:spcPts val="0"/>
+              </a:spcBef>
+              <a:spcAft>
+                <a:spcPts val="0"/>
+              </a:spcAft>
+              <a:buClr>
+                <a:srgbClr val="000000"/>
+              </a:buClr>
+              <a:buSzPts val="4000"/>
+              <a:buFont typeface="Arial"/>
+              <a:buNone/>
+            </a:pPr>
+            <a:r>
+              <a:rPr b="1" i="0" lang="mn-MN" sz="4000" u="none" cap="none" strike="noStrike">
+                <a:solidFill>
+                  <a:schemeClr val="lt1"/>
+                </a:solidFill>
+                <a:latin typeface="Montserrat"/>
+                <a:ea typeface="Montserrat"/>
+                <a:cs typeface="Montserrat"/>
+                <a:sym typeface="Montserrat"/>
+              </a:rPr>
+              <a:t>Баярлалаа!</a:t>
             </a:r>
             <a:endParaRPr/>
           </a:p>
